--- a/report/deck.pptx
+++ b/report/deck.pptx
@@ -929,7 +929,7 @@
           <a:lstStyle/>
           <a:p>
             <a:r>
-              <a:t>At the base gas price the least-cost system reaches 56% renewables, so the 35% target only binds when gas costs half as much.</a:t>
+              <a:t>At the base gas price the least-cost system reaches 56% renewables, so the 35% target binds only in G-lo-S0, G-lo-S1-15.</a:t>
             </a:r>
           </a:p>
         </p:txBody>
@@ -5255,7 +5255,7 @@
                 </a:solidFill>
                 <a:latin typeface="Calibri"/>
               </a:rPr>
-              <a:t>Demand cut 10-20%, cooling-first saving, shiftable load, gas price x0.5 and x1.5</a:t>
+              <a:t>Demand cut 10%-20%, cooling-first saving, shiftable load, gas price x0.5 and x1.5</a:t>
             </a:r>
           </a:p>
         </p:txBody>
@@ -5423,7 +5423,7 @@
                 </a:solidFill>
                 <a:latin typeface="Calibri"/>
               </a:rPr>
-              <a:t>Every input number has a row and a source in the assumptions register. 93 tests; 98% code coverage; all 11 runs pass the post-solve checks.</a:t>
+              <a:t>Every input number has a row and a source in the assumptions register. All 11 runs pass the post-solve checks.</a:t>
             </a:r>
           </a:p>
         </p:txBody>

--- a/report/deck.pptx
+++ b/report/deck.pptx
@@ -13,6 +13,7 @@
     <p:sldId id="261" r:id="rId13"/>
     <p:sldId id="262" r:id="rId14"/>
     <p:sldId id="263" r:id="rId15"/>
+    <p:sldId id="264" r:id="rId16"/>
   </p:sldIdLst>
   <p:sldSz cx="12191695" cy="6858000" type="screen4x3"/>
   <p:notesSz cx="6858000" cy="9144000"/>
@@ -955,6 +956,76 @@
 </file>
 
 <file path=ppt/notesSlides/notesSlide8.xml><?xml version="1.0" encoding="utf-8"?>
+<p:notes xmlns:a="http://schemas.openxmlformats.org/drawingml/2006/main" xmlns:p="http://schemas.openxmlformats.org/presentationml/2006/main" xmlns:r="http://schemas.openxmlformats.org/officeDocument/2006/relationships">
+  <p:cSld>
+    <p:spTree>
+      <p:nvGrpSpPr>
+        <p:cNvPr id="1" name=""/>
+        <p:cNvGrpSpPr/>
+        <p:nvPr/>
+      </p:nvGrpSpPr>
+      <p:grpSpPr>
+        <a:xfrm>
+          <a:off x="0" y="0"/>
+          <a:ext cx="0" cy="0"/>
+          <a:chOff x="0" y="0"/>
+          <a:chExt cx="0" cy="0"/>
+        </a:xfrm>
+      </p:grpSpPr>
+      <p:sp>
+        <p:nvSpPr>
+          <p:cNvPr id="2" name="Slide Image Placeholder 1"/>
+          <p:cNvSpPr>
+            <a:spLocks noGrp="1"/>
+          </p:cNvSpPr>
+          <p:nvPr>
+            <p:ph type="sldImg" idx="2"/>
+          </p:nvPr>
+        </p:nvSpPr>
+        <p:spPr/>
+      </p:sp>
+      <p:sp>
+        <p:nvSpPr>
+          <p:cNvPr id="3" name="Notes Placeholder 2"/>
+          <p:cNvSpPr>
+            <a:spLocks noGrp="1"/>
+          </p:cNvSpPr>
+          <p:nvPr>
+            <p:ph type="body" idx="3" sz="quarter"/>
+          </p:nvPr>
+        </p:nvSpPr>
+        <p:spPr/>
+        <p:txBody>
+          <a:bodyPr/>
+          <a:lstStyle/>
+          <a:p>
+            <a:r>
+              <a:t>Each year from 2027 starts from the year before; committed projects arrive in their year; new solar is capped at 268 MW a year (Tunisia's best year, 2024), new wind starts in 2029 and batteries in 2029.</a:t>
+            </a:r>
+          </a:p>
+        </p:txBody>
+      </p:sp>
+      <p:sp>
+        <p:nvSpPr>
+          <p:cNvPr id="4" name="Slide Number Placeholder 3"/>
+          <p:cNvSpPr>
+            <a:spLocks noGrp="1"/>
+          </p:cNvSpPr>
+          <p:nvPr>
+            <p:ph type="sldNum" idx="5" sz="quarter"/>
+          </p:nvPr>
+        </p:nvSpPr>
+        <p:spPr/>
+      </p:sp>
+    </p:spTree>
+  </p:cSld>
+  <p:clrMapOvr>
+    <a:masterClrMapping/>
+  </p:clrMapOvr>
+</p:notes>
+</file>
+
+<file path=ppt/notesSlides/notesSlide9.xml><?xml version="1.0" encoding="utf-8"?>
 <p:notes xmlns:a="http://schemas.openxmlformats.org/drawingml/2006/main" xmlns:p="http://schemas.openxmlformats.org/presentationml/2006/main" xmlns:r="http://schemas.openxmlformats.org/officeDocument/2006/relationships">
   <p:cSld>
     <p:spTree>
@@ -6238,6 +6309,289 @@
 <file path=ppt/slides/slide8.xml><?xml version="1.0" encoding="utf-8"?>
 <p:sld xmlns:a="http://schemas.openxmlformats.org/drawingml/2006/main" xmlns:p="http://schemas.openxmlformats.org/presentationml/2006/main" xmlns:r="http://schemas.openxmlformats.org/officeDocument/2006/relationships">
   <p:cSld>
+    <p:spTree>
+      <p:nvGrpSpPr>
+        <p:cNvPr id="1" name=""/>
+        <p:cNvGrpSpPr/>
+        <p:nvPr/>
+      </p:nvGrpSpPr>
+      <p:grpSpPr/>
+      <p:sp>
+        <p:nvSpPr>
+          <p:cNvPr id="2" name="TextBox 1"/>
+          <p:cNvSpPr txBox="1"/>
+          <p:nvPr/>
+        </p:nvSpPr>
+        <p:spPr>
+          <a:xfrm>
+            <a:off x="548640" y="365760"/>
+            <a:ext cx="11064240" cy="914400"/>
+          </a:xfrm>
+          <a:prstGeom prst="rect">
+            <a:avLst/>
+          </a:prstGeom>
+          <a:noFill/>
+        </p:spPr>
+        <p:txBody>
+          <a:bodyPr wrap="square">
+            <a:spAutoFit/>
+          </a:bodyPr>
+          <a:lstStyle/>
+          <a:p>
+            <a:pPr algn="l">
+              <a:spcAft>
+                <a:spcPts val="800"/>
+              </a:spcAft>
+            </a:pPr>
+            <a:r>
+              <a:rPr sz="3200" b="1">
+                <a:solidFill>
+                  <a:srgbClr val="1F1F1F"/>
+                </a:solidFill>
+                <a:latin typeface="Cambria"/>
+              </a:rPr>
+              <a:t>At Tunisia's real pace, 35% is out of reach</a:t>
+            </a:r>
+          </a:p>
+        </p:txBody>
+      </p:sp>
+      <p:pic>
+        <p:nvPicPr>
+          <p:cNvPr id="3" name="Picture 2" descr="10_pathway_res_share.png"/>
+          <p:cNvPicPr>
+            <a:picLocks noChangeAspect="1"/>
+          </p:cNvPicPr>
+          <p:nvPr/>
+        </p:nvPicPr>
+        <p:blipFill>
+          <a:blip r:embed="rId2"/>
+          <a:stretch>
+            <a:fillRect/>
+          </a:stretch>
+        </p:blipFill>
+        <p:spPr>
+          <a:xfrm>
+            <a:off x="365760" y="1371600"/>
+            <a:ext cx="7863840" cy="3774643"/>
+          </a:xfrm>
+          <a:prstGeom prst="rect">
+            <a:avLst/>
+          </a:prstGeom>
+        </p:spPr>
+      </p:pic>
+      <p:sp>
+        <p:nvSpPr>
+          <p:cNvPr id="4" name="Rounded Rectangle 3"/>
+          <p:cNvSpPr/>
+          <p:nvPr/>
+        </p:nvSpPr>
+        <p:spPr>
+          <a:xfrm>
+            <a:off x="8503920" y="1463040"/>
+            <a:ext cx="3200400" cy="4206240"/>
+          </a:xfrm>
+          <a:prstGeom prst="roundRect">
+            <a:avLst>
+              <a:gd name="adj" fmla="val 6000"/>
+            </a:avLst>
+          </a:prstGeom>
+          <a:solidFill>
+            <a:srgbClr val="EEF3F4"/>
+          </a:solidFill>
+          <a:ln>
+            <a:noFill/>
+          </a:ln>
+          <a:effectLst/>
+        </p:spPr>
+        <p:style>
+          <a:lnRef idx="1">
+            <a:schemeClr val="accent1"/>
+          </a:lnRef>
+          <a:fillRef idx="3">
+            <a:schemeClr val="accent1"/>
+          </a:fillRef>
+          <a:effectRef idx="2">
+            <a:schemeClr val="accent1"/>
+          </a:effectRef>
+          <a:fontRef idx="minor">
+            <a:schemeClr val="lt1"/>
+          </a:fontRef>
+        </p:style>
+        <p:txBody>
+          <a:bodyPr rtlCol="0" anchor="ctr"/>
+          <a:lstStyle/>
+          <a:p>
+            <a:pPr algn="ctr"/>
+          </a:p>
+        </p:txBody>
+      </p:sp>
+      <p:sp>
+        <p:nvSpPr>
+          <p:cNvPr id="5" name="TextBox 4"/>
+          <p:cNvSpPr txBox="1"/>
+          <p:nvPr/>
+        </p:nvSpPr>
+        <p:spPr>
+          <a:xfrm>
+            <a:off x="8686800" y="1645920"/>
+            <a:ext cx="2834640" cy="822960"/>
+          </a:xfrm>
+          <a:prstGeom prst="rect">
+            <a:avLst/>
+          </a:prstGeom>
+          <a:noFill/>
+        </p:spPr>
+        <p:txBody>
+          <a:bodyPr wrap="square">
+            <a:spAutoFit/>
+          </a:bodyPr>
+          <a:lstStyle/>
+          <a:p>
+            <a:pPr algn="l">
+              <a:spcAft>
+                <a:spcPts val="800"/>
+              </a:spcAft>
+            </a:pPr>
+            <a:r>
+              <a:rPr sz="3600" b="1">
+                <a:solidFill>
+                  <a:srgbClr val="17323B"/>
+                </a:solidFill>
+                <a:latin typeface="Cambria"/>
+              </a:rPr>
+              <a:t>22%</a:t>
+            </a:r>
+          </a:p>
+        </p:txBody>
+      </p:sp>
+      <p:sp>
+        <p:nvSpPr>
+          <p:cNvPr id="6" name="TextBox 5"/>
+          <p:cNvSpPr txBox="1"/>
+          <p:nvPr/>
+        </p:nvSpPr>
+        <p:spPr>
+          <a:xfrm>
+            <a:off x="8686800" y="2468880"/>
+            <a:ext cx="2834640" cy="822960"/>
+          </a:xfrm>
+          <a:prstGeom prst="rect">
+            <a:avLst/>
+          </a:prstGeom>
+          <a:noFill/>
+        </p:spPr>
+        <p:txBody>
+          <a:bodyPr wrap="square">
+            <a:spAutoFit/>
+          </a:bodyPr>
+          <a:lstStyle/>
+          <a:p>
+            <a:pPr algn="l">
+              <a:spcAft>
+                <a:spcPts val="800"/>
+              </a:spcAft>
+            </a:pPr>
+            <a:r>
+              <a:rPr sz="1400" b="0">
+                <a:solidFill>
+                  <a:srgbClr val="1F1F1F"/>
+                </a:solidFill>
+                <a:latin typeface="Calibri"/>
+              </a:rPr>
+              <a:t>renewables in 2030 without extra saving; 27% when saving 15%</a:t>
+            </a:r>
+          </a:p>
+        </p:txBody>
+      </p:sp>
+      <p:sp>
+        <p:nvSpPr>
+          <p:cNvPr id="7" name="TextBox 6"/>
+          <p:cNvSpPr txBox="1"/>
+          <p:nvPr/>
+        </p:nvSpPr>
+        <p:spPr>
+          <a:xfrm>
+            <a:off x="8686800" y="3566160"/>
+            <a:ext cx="2834640" cy="2011680"/>
+          </a:xfrm>
+          <a:prstGeom prst="rect">
+            <a:avLst/>
+          </a:prstGeom>
+          <a:noFill/>
+        </p:spPr>
+        <p:txBody>
+          <a:bodyPr wrap="square">
+            <a:spAutoFit/>
+          </a:bodyPr>
+          <a:lstStyle/>
+          <a:p>
+            <a:pPr algn="l">
+              <a:spcAft>
+                <a:spcPts val="800"/>
+              </a:spcAft>
+            </a:pPr>
+            <a:r>
+              <a:rPr sz="1500" b="0">
+                <a:solidFill>
+                  <a:srgbClr val="1F1F1F"/>
+                </a:solidFill>
+                <a:latin typeface="Calibri"/>
+              </a:rPr>
+              <a:t>Each MWh saved over 2027-2030 avoids 0.39 t of CO2 and 70 EUR: it comes off a gas plant.</a:t>
+            </a:r>
+          </a:p>
+        </p:txBody>
+      </p:sp>
+      <p:sp>
+        <p:nvSpPr>
+          <p:cNvPr id="8" name="TextBox 7"/>
+          <p:cNvSpPr txBox="1"/>
+          <p:nvPr/>
+        </p:nvSpPr>
+        <p:spPr>
+          <a:xfrm>
+            <a:off x="548640" y="6400800"/>
+            <a:ext cx="11064240" cy="320040"/>
+          </a:xfrm>
+          <a:prstGeom prst="rect">
+            <a:avLst/>
+          </a:prstGeom>
+          <a:noFill/>
+        </p:spPr>
+        <p:txBody>
+          <a:bodyPr wrap="square">
+            <a:spAutoFit/>
+          </a:bodyPr>
+          <a:lstStyle/>
+          <a:p>
+            <a:pPr algn="l">
+              <a:spcAft>
+                <a:spcPts val="800"/>
+              </a:spcAft>
+            </a:pPr>
+            <a:r>
+              <a:rPr sz="1000" b="0">
+                <a:solidFill>
+                  <a:srgbClr val="6B6A66"/>
+                </a:solidFill>
+                <a:latin typeface="Calibri"/>
+              </a:rPr>
+              <a:t>Source: own PyPSA-Earth model of Tunisia 2030; inputs in data/assumptions_register.xlsx</a:t>
+            </a:r>
+          </a:p>
+        </p:txBody>
+      </p:sp>
+    </p:spTree>
+  </p:cSld>
+  <p:clrMapOvr>
+    <a:masterClrMapping/>
+  </p:clrMapOvr>
+</p:sld>
+</file>
+
+<file path=ppt/slides/slide9.xml><?xml version="1.0" encoding="utf-8"?>
+<p:sld xmlns:a="http://schemas.openxmlformats.org/drawingml/2006/main" xmlns:p="http://schemas.openxmlformats.org/presentationml/2006/main" xmlns:r="http://schemas.openxmlformats.org/officeDocument/2006/relationships">
+  <p:cSld>
     <p:bg>
       <p:bgPr>
         <a:solidFill>
@@ -6365,7 +6719,7 @@
                 </a:solidFill>
                 <a:latin typeface="Calibri"/>
               </a:rPr>
-              <a:t>Least cost, not a forecast: no limit on how fast renewables are built</a:t>
+              <a:t>Not a forecast: 2030 alone has no build limit; the pathway's limits are judgements</a:t>
             </a:r>
           </a:p>
           <a:p>
@@ -6507,7 +6861,7 @@
                 </a:solidFill>
                 <a:latin typeface="Calibri"/>
               </a:rPr>
-              <a:t>Cap the yearly renewable build rate with a sourced limit</a:t>
+              <a:t>Test faster build rates as the 2 GW wind tenders progress</a:t>
             </a:r>
           </a:p>
           <a:p>
